--- a/scorecards/LSB_Asset_Scorecards.pptx
+++ b/scorecards/LSB_Asset_Scorecards.pptx
@@ -8,9 +8,10 @@
     <p:sldId id="256" r:id="rId2"/>
     <p:sldId id="257" r:id="rId3"/>
     <p:sldId id="258" r:id="rId4"/>
+    <p:sldId id="259" r:id="rId5"/>
   </p:sldIdLst>
   <p:notesMasterIdLst>
-    <p:notesMasterId r:id="rId5"/>
+    <p:notesMasterId r:id="rId6"/>
   </p:notesMasterIdLst>
   <p:sldSz cx="18288000" cy="10287000"/>
   <p:notesSz cx="10287000" cy="18288000"/>
@@ -722,6 +723,94 @@
 </p:notes>
 </file>
 
+<file path=ppt/notesSlides/notesSlide4.xml><?xml version="1.0" encoding="utf-8"?>
+<p:notes xmlns:a="http://schemas.openxmlformats.org/drawingml/2006/main" xmlns:r="http://schemas.openxmlformats.org/officeDocument/2006/relationships" xmlns:p="http://schemas.openxmlformats.org/presentationml/2006/main">
+  <p:cSld>
+    <p:spTree>
+      <p:nvGrpSpPr>
+        <p:cNvPr id="1" name=""/>
+        <p:cNvGrpSpPr/>
+        <p:nvPr/>
+      </p:nvGrpSpPr>
+      <p:grpSpPr>
+        <a:xfrm>
+          <a:off x="0" y="0"/>
+          <a:ext cx="0" cy="0"/>
+          <a:chOff x="0" y="0"/>
+          <a:chExt cx="0" cy="0"/>
+        </a:xfrm>
+      </p:grpSpPr>
+      <p:sp>
+        <p:nvSpPr>
+          <p:cNvPr id="2" name="Slide Image Placeholder 1"/>
+          <p:cNvSpPr>
+            <a:spLocks noGrp="1" noRot="1" noChangeAspect="1"/>
+          </p:cNvSpPr>
+          <p:nvPr>
+            <p:ph type="sldImg"/>
+          </p:nvPr>
+        </p:nvSpPr>
+        <p:spPr/>
+      </p:sp>
+      <p:sp>
+        <p:nvSpPr>
+          <p:cNvPr id="3" name="Notes Placeholder 2"/>
+          <p:cNvSpPr>
+            <a:spLocks noGrp="1"/>
+          </p:cNvSpPr>
+          <p:nvPr>
+            <p:ph type="body" idx="1"/>
+          </p:nvPr>
+        </p:nvSpPr>
+        <p:spPr/>
+        <p:txBody>
+          <a:bodyPr/>
+          <a:lstStyle/>
+          <a:p>
+            <a:r>
+              <a:rPr lang="en-US" dirty="0"/>
+              <a:t/>
+            </a:r>
+            <a:endParaRPr lang="en-US" dirty="0"/>
+          </a:p>
+        </p:txBody>
+      </p:sp>
+      <p:sp>
+        <p:nvSpPr>
+          <p:cNvPr id="4" name="Slide Number Placeholder 3"/>
+          <p:cNvSpPr>
+            <a:spLocks noGrp="1"/>
+          </p:cNvSpPr>
+          <p:nvPr>
+            <p:ph type="sldNum" sz="quarter" idx="10"/>
+          </p:nvPr>
+        </p:nvSpPr>
+        <p:spPr/>
+        <p:txBody>
+          <a:bodyPr/>
+          <a:lstStyle/>
+          <a:p>
+            <a:fld id="{F7021451-1387-4CA6-816F-3879F97B5CBC}" type="slidenum">
+              <a:rPr lang="en-US"/>
+              <a:t>4</a:t>
+            </a:fld>
+            <a:endParaRPr lang="en-US"/>
+          </a:p>
+        </p:txBody>
+      </p:sp>
+    </p:spTree>
+    <p:extLst>
+      <p:ext uri="{BB962C8B-B14F-4D97-AF65-F5344CB8AC3E}">
+        <p14:creationId xmlns:p14="http://schemas.microsoft.com/office/powerpoint/2010/main" val="1024086991"/>
+      </p:ext>
+    </p:extLst>
+  </p:cSld>
+  <p:clrMapOvr>
+    <a:masterClrMapping/>
+  </p:clrMapOvr>
+</p:notes>
+</file>
+
 <file path=ppt/slideLayouts/slideLayout1.xml><?xml version="1.0" encoding="utf-8"?>
 <p:sldLayout xmlns:a="http://schemas.openxmlformats.org/drawingml/2006/main" xmlns:r="http://schemas.openxmlformats.org/officeDocument/2006/relationships" xmlns:p="http://schemas.openxmlformats.org/presentationml/2006/main" preserve="1">
   <p:cSld name="DEFAULT">
@@ -1205,7 +1294,7 @@
                 <a:ea typeface="Arial" pitchFamily="34" charset="-122"/>
                 <a:cs typeface="Arial" pitchFamily="34" charset="-120"/>
               </a:rPr>
-              <a:t>1.85 / 3.00</a:t>
+              <a:t>1.65 / 3.00</a:t>
             </a:r>
             <a:endParaRPr lang="en-US" sz="1100" dirty="0"/>
           </a:p>
@@ -1664,7 +1753,7 @@
             <a:r>
               <a:rPr lang="en-US" sz="1500" b="1" dirty="0">
                 <a:solidFill>
-                  <a:srgbClr val="317A80"/>
+                  <a:srgbClr val="B00020"/>
                 </a:solidFill>
                 <a:latin typeface="Arial" pitchFamily="34" charset="0"/>
                 <a:ea typeface="Arial" pitchFamily="34" charset="-122"/>
@@ -1712,7 +1801,7 @@
                 <a:ea typeface="Arial" pitchFamily="34" charset="-122"/>
                 <a:cs typeface="Arial" pitchFamily="34" charset="-120"/>
               </a:rPr>
-              <a:t>No approved DGKζ inhibitor. Bayer and BMS each hold one Phase 1 asset; class has shown </a:t>
+              <a:t>No approved DGK inhibitor. Bayer's selective DGKζ asset (veludacigib / BAY 2965501) was </a:t>
             </a:r>
             <a:pPr indent="0" marL="0">
               <a:lnSpc>
@@ -1729,7 +1818,7 @@
                 <a:ea typeface="Arial" pitchFamily="34" charset="-122"/>
                 <a:cs typeface="Arial" pitchFamily="34" charset="-120"/>
               </a:rPr>
-              <a:t>neurotoxicity and only moderate efficacy</a:t>
+              <a:t>discontinued Nov-2025</a:t>
             </a:r>
             <a:pPr indent="0" marL="0">
               <a:lnSpc>
@@ -1746,7 +1835,41 @@
                 <a:ea typeface="Arial" pitchFamily="34" charset="-122"/>
                 <a:cs typeface="Arial" pitchFamily="34" charset="-120"/>
               </a:rPr>
-              <a:t>. The differentiators that decide the winner: brain penetrance / CNS safety margin, and DGKζ-vs-DGKα selectivity. Note: first-in-class mechanism — in tension with the best-in-class-only criterion.</a:t>
+              <a:t>; BMS-986408 and Incyte's INCB177054 both continue as </a:t>
+            </a:r>
+            <a:pPr indent="0" marL="0">
+              <a:lnSpc>
+                <a:spcPct val="108000"/>
+              </a:lnSpc>
+              <a:buNone/>
+            </a:pPr>
+            <a:r>
+              <a:rPr lang="en-US" sz="1400" b="1" dirty="0">
+                <a:solidFill>
+                  <a:srgbClr val="1F2A2B"/>
+                </a:solidFill>
+                <a:latin typeface="Arial" pitchFamily="34" charset="0"/>
+                <a:ea typeface="Arial" pitchFamily="34" charset="-122"/>
+                <a:cs typeface="Arial" pitchFamily="34" charset="-120"/>
+              </a:rPr>
+              <a:t>dual DGKα/ζ</a:t>
+            </a:r>
+            <a:pPr indent="0" marL="0">
+              <a:lnSpc>
+                <a:spcPct val="108000"/>
+              </a:lnSpc>
+              <a:buNone/>
+            </a:pPr>
+            <a:r>
+              <a:rPr lang="en-US" sz="1400" dirty="0">
+                <a:solidFill>
+                  <a:srgbClr val="1F2A2B"/>
+                </a:solidFill>
+                <a:latin typeface="Arial" pitchFamily="34" charset="0"/>
+                <a:ea typeface="Arial" pitchFamily="34" charset="-122"/>
+                <a:cs typeface="Arial" pitchFamily="34" charset="-120"/>
+              </a:rPr>
+              <a:t> inhibitors. Every asset still advancing is dual; both selective-ζ assets have been shelved. See landscape slide.</a:t>
             </a:r>
             <a:endParaRPr lang="en-US" sz="1400" dirty="0"/>
           </a:p>
@@ -2388,7 +2511,7 @@
                 <a:ea typeface="Arial" pitchFamily="34" charset="-122"/>
                 <a:cs typeface="Arial" pitchFamily="34" charset="-120"/>
               </a:rPr>
-              <a:t>Request the confidential package and run initial technical diligence (2–3 h oncology non-clinical + clinical SME review). </a:t>
+              <a:t>Request the confidential package, but lead the 2–3 h SME review with one question: </a:t>
             </a:r>
             <a:pPr indent="0" marL="0">
               <a:lnSpc>
@@ -2405,7 +2528,7 @@
                 <a:ea typeface="Arial" pitchFamily="34" charset="-122"/>
                 <a:cs typeface="Arial" pitchFamily="34" charset="-120"/>
               </a:rPr>
-              <a:t>Route to the Roche build-to-buy lane, not an LSB portfolio slot</a:t>
+              <a:t>is selective DGKζ inhibition a viable premise</a:t>
             </a:r>
             <a:pPr indent="0" marL="0">
               <a:lnSpc>
@@ -2422,7 +2545,7 @@
                 <a:ea typeface="Arial" pitchFamily="34" charset="-122"/>
                 <a:cs typeface="Arial" pitchFamily="34" charset="-120"/>
               </a:rPr>
-              <a:t> — oncology spots are reserved. Advance only if the confidential data clear three gates: (1) brain penetrance and CNS safety margin vs. Bayer/BMS, (2) DGKζ-vs-DGKα selectivity, (3) a costed IND-reactivation path.</a:t>
+              <a:t> when the published pharmacology favours dual α/ζ and both selective-ζ assets have been shelved by their owners? If that answer holds up, route to the Roche build-to-buy lane — oncology slots are reserved. Brain penetrance and selectivity are now second-order questions.</a:t>
             </a:r>
             <a:endParaRPr lang="en-US" sz="1400" dirty="0"/>
           </a:p>
@@ -3386,7 +3509,7 @@
             <a:avLst/>
           </a:prstGeom>
           <a:solidFill>
-            <a:srgbClr val="317A80"/>
+            <a:srgbClr val="DCE6E6"/>
           </a:solidFill>
           <a:ln/>
         </p:spPr>
@@ -3444,7 +3567,7 @@
                 <a:ea typeface="Arial" pitchFamily="34" charset="-122"/>
                 <a:cs typeface="Arial" pitchFamily="34" charset="-120"/>
               </a:rPr>
-              <a:t>0.40</a:t>
+              <a:t>0.20</a:t>
             </a:r>
             <a:endParaRPr lang="en-US" sz="1300" dirty="0"/>
           </a:p>
@@ -4147,7 +4270,7 @@
                 <a:ea typeface="Arial" pitchFamily="34" charset="-122"/>
                 <a:cs typeface="Arial" pitchFamily="34" charset="-120"/>
               </a:rPr>
-              <a:t>1.85 / 3.00</a:t>
+              <a:t>1.65 / 3.00</a:t>
             </a:r>
             <a:endParaRPr lang="en-US" sz="1500" dirty="0"/>
           </a:p>
@@ -4239,7 +4362,7 @@
                 <a:ea typeface="Arial" pitchFamily="34" charset="-122"/>
                 <a:cs typeface="Arial" pitchFamily="34" charset="-120"/>
               </a:rPr>
-              <a:t>2.30 / 3.00</a:t>
+              <a:t>2.10 / 3.00</a:t>
             </a:r>
             <a:endParaRPr lang="en-US" sz="1500" dirty="0"/>
           </a:p>
@@ -4541,13 +4664,13 @@
             <a:r>
               <a:rPr lang="en-US" sz="1250" b="1" dirty="0">
                 <a:solidFill>
-                  <a:srgbClr val="9A5B00"/>
-                </a:solidFill>
-                <a:latin typeface="Arial" pitchFamily="34" charset="0"/>
-                <a:ea typeface="Arial" pitchFamily="34" charset="-122"/>
-                <a:cs typeface="Arial" pitchFamily="34" charset="-120"/>
-              </a:rPr>
-              <a:t>?  </a:t>
+                  <a:srgbClr val="B00020"/>
+                </a:solidFill>
+                <a:latin typeface="Arial" pitchFamily="34" charset="0"/>
+                <a:ea typeface="Arial" pitchFamily="34" charset="-122"/>
+                <a:cs typeface="Arial" pitchFamily="34" charset="-120"/>
+              </a:rPr>
+              <a:t>!  </a:t>
             </a:r>
             <a:pPr indent="0" marL="0">
               <a:lnSpc>
@@ -4564,7 +4687,7 @@
                 <a:ea typeface="Arial" pitchFamily="34" charset="-122"/>
                 <a:cs typeface="Arial" pitchFamily="34" charset="-120"/>
               </a:rPr>
-              <a:t>COM vs. MOU split undisclosed; deal terms unknown</a:t>
+              <a:t>Class signal: 2 of 3 sponsors exited selective-ζ in 12 mths</a:t>
             </a:r>
             <a:endParaRPr lang="en-US" sz="1250" dirty="0"/>
           </a:p>
@@ -4741,7 +4864,7 @@
                 <a:ea typeface="Arial" pitchFamily="34" charset="-122"/>
                 <a:cs typeface="Arial" pitchFamily="34" charset="-120"/>
               </a:rPr>
-              <a:t>Brain Kp,uu and CNS NOAEL margin vs. class neurotoxicity</a:t>
+              <a:t>Is selective ζ viable, or is dual α/ζ coverage required?</a:t>
             </a:r>
             <a:endParaRPr lang="en-US" sz="1250" dirty="0"/>
           </a:p>
@@ -4778,7 +4901,7 @@
                 <a:ea typeface="Arial" pitchFamily="34" charset="-122"/>
                 <a:cs typeface="Arial" pitchFamily="34" charset="-120"/>
               </a:rPr>
-              <a:t>DGKζ:DGKα selectivity ratio; biomarker for patient selection</a:t>
+              <a:t>Why did Bayer stop — portfolio triage, or Phase 1 data?</a:t>
             </a:r>
             <a:endParaRPr lang="en-US" sz="1250" dirty="0"/>
           </a:p>
@@ -4815,7 +4938,7 @@
                 <a:ea typeface="Arial" pitchFamily="34" charset="-122"/>
                 <a:cs typeface="Arial" pitchFamily="34" charset="-120"/>
               </a:rPr>
-              <a:t>What drove Astellas' deprioritization — portfolio or data?</a:t>
+              <a:t>Brain Kp,uu and CNS margin; DGKζ:DGKα selectivity ratio</a:t>
             </a:r>
             <a:endParaRPr lang="en-US" sz="1250" dirty="0"/>
           </a:p>
@@ -4964,7 +5087,7 @@
                 <a:ea typeface="Arial" pitchFamily="34" charset="-122"/>
                 <a:cs typeface="Arial" pitchFamily="34" charset="-120"/>
               </a:rPr>
-              <a:t>Scoring Key</a:t>
+              <a:t>DGK Competitive Landscape</a:t>
             </a:r>
             <a:endParaRPr lang="en-US" sz="4000" dirty="0"/>
           </a:p>
@@ -5003,6 +5126,1453 @@
                 <a:ea typeface="Arial" pitchFamily="34" charset="-122"/>
                 <a:cs typeface="Arial" pitchFamily="34" charset="-120"/>
               </a:rPr>
+              <a:t>Public sources, verified September 2026 — the field has consolidated around dual DGKα/ζ inhibition, and both selective-ζ assets are shelved</a:t>
+            </a:r>
+            <a:endParaRPr lang="en-US" sz="1500" dirty="0"/>
+          </a:p>
+        </p:txBody>
+      </p:sp>
+      <p:sp>
+        <p:nvSpPr>
+          <p:cNvPr id="4" name="Shape 2"/>
+          <p:cNvSpPr/>
+          <p:nvPr/>
+        </p:nvSpPr>
+        <p:spPr>
+          <a:xfrm>
+            <a:off x="548640" y="1691640"/>
+            <a:ext cx="4091940" cy="3291840"/>
+          </a:xfrm>
+          <a:prstGeom prst="roundRect">
+            <a:avLst>
+              <a:gd name="adj" fmla="val 1389"/>
+            </a:avLst>
+          </a:prstGeom>
+          <a:solidFill>
+            <a:srgbClr val="F6FAFA"/>
+          </a:solidFill>
+          <a:ln w="12700">
+            <a:solidFill>
+              <a:srgbClr val="CDDCDC"/>
+            </a:solidFill>
+            <a:prstDash val="solid"/>
+          </a:ln>
+        </p:spPr>
+      </p:sp>
+      <p:sp>
+        <p:nvSpPr>
+          <p:cNvPr id="5" name="Text 3"/>
+          <p:cNvSpPr txBox="1"/>
+          <p:nvPr/>
+        </p:nvSpPr>
+        <p:spPr>
+          <a:xfrm>
+            <a:off x="749808" y="1819656"/>
+            <a:ext cx="3689604" cy="310896"/>
+          </a:xfrm>
+          <a:prstGeom prst="rect">
+            <a:avLst/>
+          </a:prstGeom>
+          <a:noFill/>
+          <a:ln/>
+        </p:spPr>
+        <p:txBody>
+          <a:bodyPr wrap="square" lIns="0" tIns="0" rIns="0" bIns="0" rtlCol="0" anchor="ctr"/>
+          <a:lstStyle/>
+          <a:p>
+            <a:pPr indent="0" marL="0">
+              <a:buNone/>
+            </a:pPr>
+            <a:r>
+              <a:rPr lang="en-US" sz="1600" b="1" dirty="0">
+                <a:solidFill>
+                  <a:srgbClr val="22585C"/>
+                </a:solidFill>
+                <a:latin typeface="Arial" pitchFamily="34" charset="0"/>
+                <a:ea typeface="Arial" pitchFamily="34" charset="-122"/>
+                <a:cs typeface="Arial" pitchFamily="34" charset="-120"/>
+              </a:rPr>
+              <a:t>ASP2616</a:t>
+            </a:r>
+            <a:endParaRPr lang="en-US" sz="1600" dirty="0"/>
+          </a:p>
+        </p:txBody>
+      </p:sp>
+      <p:sp>
+        <p:nvSpPr>
+          <p:cNvPr id="6" name="Text 4"/>
+          <p:cNvSpPr txBox="1"/>
+          <p:nvPr/>
+        </p:nvSpPr>
+        <p:spPr>
+          <a:xfrm>
+            <a:off x="749808" y="2130552"/>
+            <a:ext cx="3689604" cy="237744"/>
+          </a:xfrm>
+          <a:prstGeom prst="rect">
+            <a:avLst/>
+          </a:prstGeom>
+          <a:noFill/>
+          <a:ln/>
+        </p:spPr>
+        <p:txBody>
+          <a:bodyPr wrap="square" lIns="0" tIns="0" rIns="0" bIns="0" rtlCol="0" anchor="ctr"/>
+          <a:lstStyle/>
+          <a:p>
+            <a:pPr indent="0" marL="0">
+              <a:buNone/>
+            </a:pPr>
+            <a:r>
+              <a:rPr lang="en-US" sz="1250" dirty="0">
+                <a:solidFill>
+                  <a:srgbClr val="595959"/>
+                </a:solidFill>
+                <a:latin typeface="Arial" pitchFamily="34" charset="0"/>
+                <a:ea typeface="Arial" pitchFamily="34" charset="-122"/>
+                <a:cs typeface="Arial" pitchFamily="34" charset="-120"/>
+              </a:rPr>
+              <a:t>Astellas  ·  selective DGKζ, oral</a:t>
+            </a:r>
+            <a:endParaRPr lang="en-US" sz="1250" dirty="0"/>
+          </a:p>
+        </p:txBody>
+      </p:sp>
+      <p:sp>
+        <p:nvSpPr>
+          <p:cNvPr id="7" name="Shape 5"/>
+          <p:cNvSpPr/>
+          <p:nvPr/>
+        </p:nvSpPr>
+        <p:spPr>
+          <a:xfrm>
+            <a:off x="749808" y="2441448"/>
+            <a:ext cx="3689604" cy="329184"/>
+          </a:xfrm>
+          <a:prstGeom prst="roundRect">
+            <a:avLst>
+              <a:gd name="adj" fmla="val 16667"/>
+            </a:avLst>
+          </a:prstGeom>
+          <a:solidFill>
+            <a:srgbClr val="E9F1F1"/>
+          </a:solidFill>
+          <a:ln w="12700">
+            <a:solidFill>
+              <a:srgbClr val="CDDCDC"/>
+            </a:solidFill>
+            <a:prstDash val="solid"/>
+          </a:ln>
+        </p:spPr>
+      </p:sp>
+      <p:sp>
+        <p:nvSpPr>
+          <p:cNvPr id="8" name="Text 6"/>
+          <p:cNvSpPr txBox="1"/>
+          <p:nvPr/>
+        </p:nvSpPr>
+        <p:spPr>
+          <a:xfrm>
+            <a:off x="749808" y="2441448"/>
+            <a:ext cx="3689604" cy="329184"/>
+          </a:xfrm>
+          <a:prstGeom prst="rect">
+            <a:avLst/>
+          </a:prstGeom>
+          <a:noFill/>
+          <a:ln/>
+        </p:spPr>
+        <p:txBody>
+          <a:bodyPr wrap="square" lIns="0" tIns="0" rIns="0" bIns="0" rtlCol="0" anchor="ctr"/>
+          <a:lstStyle/>
+          <a:p>
+            <a:pPr algn="ctr" indent="0" marL="0">
+              <a:buNone/>
+            </a:pPr>
+            <a:r>
+              <a:rPr lang="en-US" sz="1150" b="1" spc="60" kern="0" dirty="0">
+                <a:solidFill>
+                  <a:srgbClr val="22585C"/>
+                </a:solidFill>
+                <a:latin typeface="Arial" pitchFamily="34" charset="0"/>
+                <a:ea typeface="Arial" pitchFamily="34" charset="-122"/>
+                <a:cs typeface="Arial" pitchFamily="34" charset="-120"/>
+              </a:rPr>
+              <a:t>AVAILABLE — SHELVED</a:t>
+            </a:r>
+            <a:endParaRPr lang="en-US" sz="1150" dirty="0"/>
+          </a:p>
+        </p:txBody>
+      </p:sp>
+      <p:sp>
+        <p:nvSpPr>
+          <p:cNvPr id="9" name="Text 7"/>
+          <p:cNvSpPr txBox="1"/>
+          <p:nvPr/>
+        </p:nvSpPr>
+        <p:spPr>
+          <a:xfrm>
+            <a:off x="749808" y="2898648"/>
+            <a:ext cx="3689604" cy="1920240"/>
+          </a:xfrm>
+          <a:prstGeom prst="rect">
+            <a:avLst/>
+          </a:prstGeom>
+          <a:noFill/>
+          <a:ln/>
+        </p:spPr>
+        <p:txBody>
+          <a:bodyPr wrap="square" lIns="0" tIns="0" rIns="0" bIns="0" rtlCol="0" anchor="t"/>
+          <a:lstStyle/>
+          <a:p>
+            <a:pPr indent="0" marL="0">
+              <a:lnSpc>
+                <a:spcPct val="110000"/>
+              </a:lnSpc>
+              <a:buNone/>
+            </a:pPr>
+            <a:r>
+              <a:rPr lang="en-US" sz="1250" dirty="0">
+                <a:solidFill>
+                  <a:srgbClr val="1F2A2B"/>
+                </a:solidFill>
+                <a:latin typeface="Arial" pitchFamily="34" charset="0"/>
+                <a:ea typeface="Arial" pitchFamily="34" charset="-122"/>
+                <a:cs typeface="Arial" pitchFamily="34" charset="-120"/>
+              </a:rPr>
+              <a:t>IND cleared Jun-2022 and never used — no site initiations, no patients dosed. IND inactivated 08-May-2026. Full preclinical package: pharmacology, ADME, reversible 4-week rat and cyno tox.</a:t>
+            </a:r>
+            <a:endParaRPr lang="en-US" sz="1250" dirty="0"/>
+          </a:p>
+        </p:txBody>
+      </p:sp>
+      <p:sp>
+        <p:nvSpPr>
+          <p:cNvPr id="10" name="Shape 8"/>
+          <p:cNvSpPr/>
+          <p:nvPr/>
+        </p:nvSpPr>
+        <p:spPr>
+          <a:xfrm>
+            <a:off x="4914900" y="1691640"/>
+            <a:ext cx="4091940" cy="3291840"/>
+          </a:xfrm>
+          <a:prstGeom prst="roundRect">
+            <a:avLst>
+              <a:gd name="adj" fmla="val 1389"/>
+            </a:avLst>
+          </a:prstGeom>
+          <a:solidFill>
+            <a:srgbClr val="F6FAFA"/>
+          </a:solidFill>
+          <a:ln w="12700">
+            <a:solidFill>
+              <a:srgbClr val="CDDCDC"/>
+            </a:solidFill>
+            <a:prstDash val="solid"/>
+          </a:ln>
+        </p:spPr>
+      </p:sp>
+      <p:sp>
+        <p:nvSpPr>
+          <p:cNvPr id="11" name="Text 9"/>
+          <p:cNvSpPr txBox="1"/>
+          <p:nvPr/>
+        </p:nvSpPr>
+        <p:spPr>
+          <a:xfrm>
+            <a:off x="5116068" y="1819656"/>
+            <a:ext cx="3689604" cy="310896"/>
+          </a:xfrm>
+          <a:prstGeom prst="rect">
+            <a:avLst/>
+          </a:prstGeom>
+          <a:noFill/>
+          <a:ln/>
+        </p:spPr>
+        <p:txBody>
+          <a:bodyPr wrap="square" lIns="0" tIns="0" rIns="0" bIns="0" rtlCol="0" anchor="ctr"/>
+          <a:lstStyle/>
+          <a:p>
+            <a:pPr indent="0" marL="0">
+              <a:buNone/>
+            </a:pPr>
+            <a:r>
+              <a:rPr lang="en-US" sz="1600" b="1" dirty="0">
+                <a:solidFill>
+                  <a:srgbClr val="22585C"/>
+                </a:solidFill>
+                <a:latin typeface="Arial" pitchFamily="34" charset="0"/>
+                <a:ea typeface="Arial" pitchFamily="34" charset="-122"/>
+                <a:cs typeface="Arial" pitchFamily="34" charset="-120"/>
+              </a:rPr>
+              <a:t>Veludacigib</a:t>
+            </a:r>
+            <a:endParaRPr lang="en-US" sz="1600" dirty="0"/>
+          </a:p>
+        </p:txBody>
+      </p:sp>
+      <p:sp>
+        <p:nvSpPr>
+          <p:cNvPr id="12" name="Text 10"/>
+          <p:cNvSpPr txBox="1"/>
+          <p:nvPr/>
+        </p:nvSpPr>
+        <p:spPr>
+          <a:xfrm>
+            <a:off x="5116068" y="2130552"/>
+            <a:ext cx="3689604" cy="237744"/>
+          </a:xfrm>
+          <a:prstGeom prst="rect">
+            <a:avLst/>
+          </a:prstGeom>
+          <a:noFill/>
+          <a:ln/>
+        </p:spPr>
+        <p:txBody>
+          <a:bodyPr wrap="square" lIns="0" tIns="0" rIns="0" bIns="0" rtlCol="0" anchor="ctr"/>
+          <a:lstStyle/>
+          <a:p>
+            <a:pPr indent="0" marL="0">
+              <a:buNone/>
+            </a:pPr>
+            <a:r>
+              <a:rPr lang="en-US" sz="1250" dirty="0">
+                <a:solidFill>
+                  <a:srgbClr val="595959"/>
+                </a:solidFill>
+                <a:latin typeface="Arial" pitchFamily="34" charset="0"/>
+                <a:ea typeface="Arial" pitchFamily="34" charset="-122"/>
+                <a:cs typeface="Arial" pitchFamily="34" charset="-120"/>
+              </a:rPr>
+              <a:t>Bayer / DKFZ  ·  selective DGKζ, oral</a:t>
+            </a:r>
+            <a:endParaRPr lang="en-US" sz="1250" dirty="0"/>
+          </a:p>
+        </p:txBody>
+      </p:sp>
+      <p:sp>
+        <p:nvSpPr>
+          <p:cNvPr id="13" name="Shape 11"/>
+          <p:cNvSpPr/>
+          <p:nvPr/>
+        </p:nvSpPr>
+        <p:spPr>
+          <a:xfrm>
+            <a:off x="5116068" y="2441448"/>
+            <a:ext cx="3689604" cy="329184"/>
+          </a:xfrm>
+          <a:prstGeom prst="roundRect">
+            <a:avLst>
+              <a:gd name="adj" fmla="val 16667"/>
+            </a:avLst>
+          </a:prstGeom>
+          <a:solidFill>
+            <a:srgbClr val="FBEAEC"/>
+          </a:solidFill>
+          <a:ln w="12700">
+            <a:solidFill>
+              <a:srgbClr val="E8BFC6"/>
+            </a:solidFill>
+            <a:prstDash val="solid"/>
+          </a:ln>
+        </p:spPr>
+      </p:sp>
+      <p:sp>
+        <p:nvSpPr>
+          <p:cNvPr id="14" name="Text 12"/>
+          <p:cNvSpPr txBox="1"/>
+          <p:nvPr/>
+        </p:nvSpPr>
+        <p:spPr>
+          <a:xfrm>
+            <a:off x="5116068" y="2441448"/>
+            <a:ext cx="3689604" cy="329184"/>
+          </a:xfrm>
+          <a:prstGeom prst="rect">
+            <a:avLst/>
+          </a:prstGeom>
+          <a:noFill/>
+          <a:ln/>
+        </p:spPr>
+        <p:txBody>
+          <a:bodyPr wrap="square" lIns="0" tIns="0" rIns="0" bIns="0" rtlCol="0" anchor="ctr"/>
+          <a:lstStyle/>
+          <a:p>
+            <a:pPr algn="ctr" indent="0" marL="0">
+              <a:buNone/>
+            </a:pPr>
+            <a:r>
+              <a:rPr lang="en-US" sz="1150" b="1" spc="60" kern="0" dirty="0">
+                <a:solidFill>
+                  <a:srgbClr val="B00020"/>
+                </a:solidFill>
+                <a:latin typeface="Arial" pitchFamily="34" charset="0"/>
+                <a:ea typeface="Arial" pitchFamily="34" charset="-122"/>
+                <a:cs typeface="Arial" pitchFamily="34" charset="-120"/>
+              </a:rPr>
+              <a:t>DISCONTINUED NOV-2025</a:t>
+            </a:r>
+            <a:endParaRPr lang="en-US" sz="1150" dirty="0"/>
+          </a:p>
+        </p:txBody>
+      </p:sp>
+      <p:sp>
+        <p:nvSpPr>
+          <p:cNvPr id="15" name="Text 13"/>
+          <p:cNvSpPr txBox="1"/>
+          <p:nvPr/>
+        </p:nvSpPr>
+        <p:spPr>
+          <a:xfrm>
+            <a:off x="5116068" y="2898648"/>
+            <a:ext cx="3689604" cy="1920240"/>
+          </a:xfrm>
+          <a:prstGeom prst="rect">
+            <a:avLst/>
+          </a:prstGeom>
+          <a:noFill/>
+          <a:ln/>
+        </p:spPr>
+        <p:txBody>
+          <a:bodyPr wrap="square" lIns="0" tIns="0" rIns="0" bIns="0" rtlCol="0" anchor="t"/>
+          <a:lstStyle/>
+          <a:p>
+            <a:pPr indent="0" marL="0">
+              <a:lnSpc>
+                <a:spcPct val="110000"/>
+              </a:lnSpc>
+              <a:buNone/>
+            </a:pPr>
+            <a:r>
+              <a:rPr lang="en-US" sz="1250" dirty="0">
+                <a:solidFill>
+                  <a:srgbClr val="1F2A2B"/>
+                </a:solidFill>
+                <a:latin typeface="Arial" pitchFamily="34" charset="0"/>
+                <a:ea typeface="Arial" pitchFamily="34" charset="-122"/>
+                <a:cs typeface="Arial" pitchFamily="34" charset="-120"/>
+              </a:rPr>
+              <a:t>BAY 2965501. Phase 1 FIH (NCT05614102) in NSCLC, gastric/GEJ, ccRCC and melanoma. Dropped in an early-stage oncology clear-out alongside DGKα asset BAY 2862789. Bayer cited </a:t>
+            </a:r>
+            <a:pPr indent="0" marL="0">
+              <a:lnSpc>
+                <a:spcPct val="110000"/>
+              </a:lnSpc>
+              <a:buNone/>
+            </a:pPr>
+            <a:r>
+              <a:rPr lang="en-US" sz="1250" b="1" dirty="0">
+                <a:solidFill>
+                  <a:srgbClr val="1F2A2B"/>
+                </a:solidFill>
+                <a:latin typeface="Arial" pitchFamily="34" charset="0"/>
+                <a:ea typeface="Arial" pitchFamily="34" charset="-122"/>
+                <a:cs typeface="Arial" pitchFamily="34" charset="-120"/>
+              </a:rPr>
+              <a:t>portfolio refocus</a:t>
+            </a:r>
+            <a:pPr indent="0" marL="0">
+              <a:lnSpc>
+                <a:spcPct val="110000"/>
+              </a:lnSpc>
+              <a:buNone/>
+            </a:pPr>
+            <a:r>
+              <a:rPr lang="en-US" sz="1250" dirty="0">
+                <a:solidFill>
+                  <a:srgbClr val="1F2A2B"/>
+                </a:solidFill>
+                <a:latin typeface="Arial" pitchFamily="34" charset="0"/>
+                <a:ea typeface="Arial" pitchFamily="34" charset="-122"/>
+                <a:cs typeface="Arial" pitchFamily="34" charset="-120"/>
+              </a:rPr>
+              <a:t> on GU/GI/lung — no safety or efficacy failure was disclosed.</a:t>
+            </a:r>
+            <a:endParaRPr lang="en-US" sz="1250" dirty="0"/>
+          </a:p>
+        </p:txBody>
+      </p:sp>
+      <p:sp>
+        <p:nvSpPr>
+          <p:cNvPr id="16" name="Shape 14"/>
+          <p:cNvSpPr/>
+          <p:nvPr/>
+        </p:nvSpPr>
+        <p:spPr>
+          <a:xfrm>
+            <a:off x="9281160" y="1691640"/>
+            <a:ext cx="4091940" cy="3291840"/>
+          </a:xfrm>
+          <a:prstGeom prst="roundRect">
+            <a:avLst>
+              <a:gd name="adj" fmla="val 1389"/>
+            </a:avLst>
+          </a:prstGeom>
+          <a:solidFill>
+            <a:srgbClr val="F6FAFA"/>
+          </a:solidFill>
+          <a:ln w="12700">
+            <a:solidFill>
+              <a:srgbClr val="CDDCDC"/>
+            </a:solidFill>
+            <a:prstDash val="solid"/>
+          </a:ln>
+        </p:spPr>
+      </p:sp>
+      <p:sp>
+        <p:nvSpPr>
+          <p:cNvPr id="17" name="Text 15"/>
+          <p:cNvSpPr txBox="1"/>
+          <p:nvPr/>
+        </p:nvSpPr>
+        <p:spPr>
+          <a:xfrm>
+            <a:off x="9482328" y="1819656"/>
+            <a:ext cx="3689604" cy="310896"/>
+          </a:xfrm>
+          <a:prstGeom prst="rect">
+            <a:avLst/>
+          </a:prstGeom>
+          <a:noFill/>
+          <a:ln/>
+        </p:spPr>
+        <p:txBody>
+          <a:bodyPr wrap="square" lIns="0" tIns="0" rIns="0" bIns="0" rtlCol="0" anchor="ctr"/>
+          <a:lstStyle/>
+          <a:p>
+            <a:pPr indent="0" marL="0">
+              <a:buNone/>
+            </a:pPr>
+            <a:r>
+              <a:rPr lang="en-US" sz="1600" b="1" dirty="0">
+                <a:solidFill>
+                  <a:srgbClr val="22585C"/>
+                </a:solidFill>
+                <a:latin typeface="Arial" pitchFamily="34" charset="0"/>
+                <a:ea typeface="Arial" pitchFamily="34" charset="-122"/>
+                <a:cs typeface="Arial" pitchFamily="34" charset="-120"/>
+              </a:rPr>
+              <a:t>BMS-986408</a:t>
+            </a:r>
+            <a:endParaRPr lang="en-US" sz="1600" dirty="0"/>
+          </a:p>
+        </p:txBody>
+      </p:sp>
+      <p:sp>
+        <p:nvSpPr>
+          <p:cNvPr id="18" name="Text 16"/>
+          <p:cNvSpPr txBox="1"/>
+          <p:nvPr/>
+        </p:nvSpPr>
+        <p:spPr>
+          <a:xfrm>
+            <a:off x="9482328" y="2130552"/>
+            <a:ext cx="3689604" cy="237744"/>
+          </a:xfrm>
+          <a:prstGeom prst="rect">
+            <a:avLst/>
+          </a:prstGeom>
+          <a:noFill/>
+          <a:ln/>
+        </p:spPr>
+        <p:txBody>
+          <a:bodyPr wrap="square" lIns="0" tIns="0" rIns="0" bIns="0" rtlCol="0" anchor="ctr"/>
+          <a:lstStyle/>
+          <a:p>
+            <a:pPr indent="0" marL="0">
+              <a:buNone/>
+            </a:pPr>
+            <a:r>
+              <a:rPr lang="en-US" sz="1250" dirty="0">
+                <a:solidFill>
+                  <a:srgbClr val="595959"/>
+                </a:solidFill>
+                <a:latin typeface="Arial" pitchFamily="34" charset="0"/>
+                <a:ea typeface="Arial" pitchFamily="34" charset="-122"/>
+                <a:cs typeface="Arial" pitchFamily="34" charset="-120"/>
+              </a:rPr>
+              <a:t>Bristol Myers Squibb  ·  dual α/ζ, oral</a:t>
+            </a:r>
+            <a:endParaRPr lang="en-US" sz="1250" dirty="0"/>
+          </a:p>
+        </p:txBody>
+      </p:sp>
+      <p:sp>
+        <p:nvSpPr>
+          <p:cNvPr id="19" name="Shape 17"/>
+          <p:cNvSpPr/>
+          <p:nvPr/>
+        </p:nvSpPr>
+        <p:spPr>
+          <a:xfrm>
+            <a:off x="9482328" y="2441448"/>
+            <a:ext cx="3689604" cy="329184"/>
+          </a:xfrm>
+          <a:prstGeom prst="roundRect">
+            <a:avLst>
+              <a:gd name="adj" fmla="val 16667"/>
+            </a:avLst>
+          </a:prstGeom>
+          <a:solidFill>
+            <a:srgbClr val="E8F3E9"/>
+          </a:solidFill>
+          <a:ln w="12700">
+            <a:solidFill>
+              <a:srgbClr val="BFD9C1"/>
+            </a:solidFill>
+            <a:prstDash val="solid"/>
+          </a:ln>
+        </p:spPr>
+      </p:sp>
+      <p:sp>
+        <p:nvSpPr>
+          <p:cNvPr id="20" name="Text 18"/>
+          <p:cNvSpPr txBox="1"/>
+          <p:nvPr/>
+        </p:nvSpPr>
+        <p:spPr>
+          <a:xfrm>
+            <a:off x="9482328" y="2441448"/>
+            <a:ext cx="3689604" cy="329184"/>
+          </a:xfrm>
+          <a:prstGeom prst="rect">
+            <a:avLst/>
+          </a:prstGeom>
+          <a:noFill/>
+          <a:ln/>
+        </p:spPr>
+        <p:txBody>
+          <a:bodyPr wrap="square" lIns="0" tIns="0" rIns="0" bIns="0" rtlCol="0" anchor="ctr"/>
+          <a:lstStyle/>
+          <a:p>
+            <a:pPr algn="ctr" indent="0" marL="0">
+              <a:buNone/>
+            </a:pPr>
+            <a:r>
+              <a:rPr lang="en-US" sz="1150" b="1" spc="60" kern="0" dirty="0">
+                <a:solidFill>
+                  <a:srgbClr val="2E7D32"/>
+                </a:solidFill>
+                <a:latin typeface="Arial" pitchFamily="34" charset="0"/>
+                <a:ea typeface="Arial" pitchFamily="34" charset="-122"/>
+                <a:cs typeface="Arial" pitchFamily="34" charset="-120"/>
+              </a:rPr>
+              <a:t>ACTIVE — PHASE 1/2</a:t>
+            </a:r>
+            <a:endParaRPr lang="en-US" sz="1150" dirty="0"/>
+          </a:p>
+        </p:txBody>
+      </p:sp>
+      <p:sp>
+        <p:nvSpPr>
+          <p:cNvPr id="21" name="Text 19"/>
+          <p:cNvSpPr txBox="1"/>
+          <p:nvPr/>
+        </p:nvSpPr>
+        <p:spPr>
+          <a:xfrm>
+            <a:off x="9482328" y="2898648"/>
+            <a:ext cx="3689604" cy="1920240"/>
+          </a:xfrm>
+          <a:prstGeom prst="rect">
+            <a:avLst/>
+          </a:prstGeom>
+          <a:noFill/>
+          <a:ln/>
+        </p:spPr>
+        <p:txBody>
+          <a:bodyPr wrap="square" lIns="0" tIns="0" rIns="0" bIns="0" rtlCol="0" anchor="t"/>
+          <a:lstStyle/>
+          <a:p>
+            <a:pPr indent="0" marL="0">
+              <a:lnSpc>
+                <a:spcPct val="110000"/>
+              </a:lnSpc>
+              <a:buNone/>
+            </a:pPr>
+            <a:r>
+              <a:rPr lang="en-US" sz="1250" dirty="0">
+                <a:solidFill>
+                  <a:srgbClr val="1F2A2B"/>
+                </a:solidFill>
+                <a:latin typeface="Arial" pitchFamily="34" charset="0"/>
+                <a:ea typeface="Arial" pitchFamily="34" charset="-122"/>
+                <a:cs typeface="Arial" pitchFamily="34" charset="-120"/>
+              </a:rPr>
+              <a:t>First-in-class dual DGKα/ζ inhibitor. Phase 1/2 (NCT05407675) as monotherapy and with nivolumab, and with nivolumab + ipilimumab, in advanced solid tumors. Discovery published 2025 in Cancer Immunol Res and J Med Chem.</a:t>
+            </a:r>
+            <a:endParaRPr lang="en-US" sz="1250" dirty="0"/>
+          </a:p>
+        </p:txBody>
+      </p:sp>
+      <p:sp>
+        <p:nvSpPr>
+          <p:cNvPr id="22" name="Shape 20"/>
+          <p:cNvSpPr/>
+          <p:nvPr/>
+        </p:nvSpPr>
+        <p:spPr>
+          <a:xfrm>
+            <a:off x="13647420" y="1691640"/>
+            <a:ext cx="4091940" cy="3291840"/>
+          </a:xfrm>
+          <a:prstGeom prst="roundRect">
+            <a:avLst>
+              <a:gd name="adj" fmla="val 1389"/>
+            </a:avLst>
+          </a:prstGeom>
+          <a:solidFill>
+            <a:srgbClr val="F6FAFA"/>
+          </a:solidFill>
+          <a:ln w="12700">
+            <a:solidFill>
+              <a:srgbClr val="CDDCDC"/>
+            </a:solidFill>
+            <a:prstDash val="solid"/>
+          </a:ln>
+        </p:spPr>
+      </p:sp>
+      <p:sp>
+        <p:nvSpPr>
+          <p:cNvPr id="23" name="Text 21"/>
+          <p:cNvSpPr txBox="1"/>
+          <p:nvPr/>
+        </p:nvSpPr>
+        <p:spPr>
+          <a:xfrm>
+            <a:off x="13848588" y="1819656"/>
+            <a:ext cx="3689604" cy="310896"/>
+          </a:xfrm>
+          <a:prstGeom prst="rect">
+            <a:avLst/>
+          </a:prstGeom>
+          <a:noFill/>
+          <a:ln/>
+        </p:spPr>
+        <p:txBody>
+          <a:bodyPr wrap="square" lIns="0" tIns="0" rIns="0" bIns="0" rtlCol="0" anchor="ctr"/>
+          <a:lstStyle/>
+          <a:p>
+            <a:pPr indent="0" marL="0">
+              <a:buNone/>
+            </a:pPr>
+            <a:r>
+              <a:rPr lang="en-US" sz="1600" b="1" dirty="0">
+                <a:solidFill>
+                  <a:srgbClr val="22585C"/>
+                </a:solidFill>
+                <a:latin typeface="Arial" pitchFamily="34" charset="0"/>
+                <a:ea typeface="Arial" pitchFamily="34" charset="-122"/>
+                <a:cs typeface="Arial" pitchFamily="34" charset="-120"/>
+              </a:rPr>
+              <a:t>INCB177054</a:t>
+            </a:r>
+            <a:endParaRPr lang="en-US" sz="1600" dirty="0"/>
+          </a:p>
+        </p:txBody>
+      </p:sp>
+      <p:sp>
+        <p:nvSpPr>
+          <p:cNvPr id="24" name="Text 22"/>
+          <p:cNvSpPr txBox="1"/>
+          <p:nvPr/>
+        </p:nvSpPr>
+        <p:spPr>
+          <a:xfrm>
+            <a:off x="13848588" y="2130552"/>
+            <a:ext cx="3689604" cy="237744"/>
+          </a:xfrm>
+          <a:prstGeom prst="rect">
+            <a:avLst/>
+          </a:prstGeom>
+          <a:noFill/>
+          <a:ln/>
+        </p:spPr>
+        <p:txBody>
+          <a:bodyPr wrap="square" lIns="0" tIns="0" rIns="0" bIns="0" rtlCol="0" anchor="ctr"/>
+          <a:lstStyle/>
+          <a:p>
+            <a:pPr indent="0" marL="0">
+              <a:buNone/>
+            </a:pPr>
+            <a:r>
+              <a:rPr lang="en-US" sz="1250" dirty="0">
+                <a:solidFill>
+                  <a:srgbClr val="595959"/>
+                </a:solidFill>
+                <a:latin typeface="Arial" pitchFamily="34" charset="0"/>
+                <a:ea typeface="Arial" pitchFamily="34" charset="-122"/>
+                <a:cs typeface="Arial" pitchFamily="34" charset="-120"/>
+              </a:rPr>
+              <a:t>Incyte  ·  dual α/ζ, oral</a:t>
+            </a:r>
+            <a:endParaRPr lang="en-US" sz="1250" dirty="0"/>
+          </a:p>
+        </p:txBody>
+      </p:sp>
+      <p:sp>
+        <p:nvSpPr>
+          <p:cNvPr id="25" name="Shape 23"/>
+          <p:cNvSpPr/>
+          <p:nvPr/>
+        </p:nvSpPr>
+        <p:spPr>
+          <a:xfrm>
+            <a:off x="13848588" y="2441448"/>
+            <a:ext cx="3689604" cy="329184"/>
+          </a:xfrm>
+          <a:prstGeom prst="roundRect">
+            <a:avLst>
+              <a:gd name="adj" fmla="val 16667"/>
+            </a:avLst>
+          </a:prstGeom>
+          <a:solidFill>
+            <a:srgbClr val="FCF3E6"/>
+          </a:solidFill>
+          <a:ln w="12700">
+            <a:solidFill>
+              <a:srgbClr val="EAD5B4"/>
+            </a:solidFill>
+            <a:prstDash val="solid"/>
+          </a:ln>
+        </p:spPr>
+      </p:sp>
+      <p:sp>
+        <p:nvSpPr>
+          <p:cNvPr id="26" name="Text 24"/>
+          <p:cNvSpPr txBox="1"/>
+          <p:nvPr/>
+        </p:nvSpPr>
+        <p:spPr>
+          <a:xfrm>
+            <a:off x="13848588" y="2441448"/>
+            <a:ext cx="3689604" cy="329184"/>
+          </a:xfrm>
+          <a:prstGeom prst="rect">
+            <a:avLst/>
+          </a:prstGeom>
+          <a:noFill/>
+          <a:ln/>
+        </p:spPr>
+        <p:txBody>
+          <a:bodyPr wrap="square" lIns="0" tIns="0" rIns="0" bIns="0" rtlCol="0" anchor="ctr"/>
+          <a:lstStyle/>
+          <a:p>
+            <a:pPr algn="ctr" indent="0" marL="0">
+              <a:buNone/>
+            </a:pPr>
+            <a:r>
+              <a:rPr lang="en-US" sz="1150" b="1" spc="60" kern="0" dirty="0">
+                <a:solidFill>
+                  <a:srgbClr val="9A5B00"/>
+                </a:solidFill>
+                <a:latin typeface="Arial" pitchFamily="34" charset="0"/>
+                <a:ea typeface="Arial" pitchFamily="34" charset="-122"/>
+                <a:cs typeface="Arial" pitchFamily="34" charset="-120"/>
+              </a:rPr>
+              <a:t>EARLY / DISCLOSED 2025</a:t>
+            </a:r>
+            <a:endParaRPr lang="en-US" sz="1150" dirty="0"/>
+          </a:p>
+        </p:txBody>
+      </p:sp>
+      <p:sp>
+        <p:nvSpPr>
+          <p:cNvPr id="27" name="Text 25"/>
+          <p:cNvSpPr txBox="1"/>
+          <p:nvPr/>
+        </p:nvSpPr>
+        <p:spPr>
+          <a:xfrm>
+            <a:off x="13848588" y="2898648"/>
+            <a:ext cx="3689604" cy="1920240"/>
+          </a:xfrm>
+          <a:prstGeom prst="rect">
+            <a:avLst/>
+          </a:prstGeom>
+          <a:noFill/>
+          <a:ln/>
+        </p:spPr>
+        <p:txBody>
+          <a:bodyPr wrap="square" lIns="0" tIns="0" rIns="0" bIns="0" rtlCol="0" anchor="t"/>
+          <a:lstStyle/>
+          <a:p>
+            <a:pPr indent="0" marL="0">
+              <a:lnSpc>
+                <a:spcPct val="110000"/>
+              </a:lnSpc>
+              <a:buNone/>
+            </a:pPr>
+            <a:r>
+              <a:rPr lang="en-US" sz="1250" dirty="0">
+                <a:solidFill>
+                  <a:srgbClr val="1F2A2B"/>
+                </a:solidFill>
+                <a:latin typeface="Arial" pitchFamily="34" charset="0"/>
+                <a:ea typeface="Arial" pitchFamily="34" charset="-122"/>
+                <a:cs typeface="Arial" pitchFamily="34" charset="-120"/>
+              </a:rPr>
+              <a:t>Potent oral dual DGKα/ζ inhibitor; preclinical disclosure at AACR 2025. Also emerging: ISM4312A (Insilico, DGKα-selective, preclinical) and DGK degraders in academic preprints — a modality that would reset the field again.</a:t>
+            </a:r>
+            <a:endParaRPr lang="en-US" sz="1250" dirty="0"/>
+          </a:p>
+        </p:txBody>
+      </p:sp>
+      <p:sp>
+        <p:nvSpPr>
+          <p:cNvPr id="28" name="Shape 26"/>
+          <p:cNvSpPr/>
+          <p:nvPr/>
+        </p:nvSpPr>
+        <p:spPr>
+          <a:xfrm>
+            <a:off x="548640" y="5257800"/>
+            <a:ext cx="17190720" cy="3566160"/>
+          </a:xfrm>
+          <a:prstGeom prst="roundRect">
+            <a:avLst>
+              <a:gd name="adj" fmla="val 1282"/>
+            </a:avLst>
+          </a:prstGeom>
+          <a:solidFill>
+            <a:srgbClr val="FFFFFF"/>
+          </a:solidFill>
+          <a:ln w="12700">
+            <a:solidFill>
+              <a:srgbClr val="CDDCDC"/>
+            </a:solidFill>
+            <a:prstDash val="solid"/>
+          </a:ln>
+        </p:spPr>
+      </p:sp>
+      <p:sp>
+        <p:nvSpPr>
+          <p:cNvPr id="29" name="Shape 27"/>
+          <p:cNvSpPr/>
+          <p:nvPr/>
+        </p:nvSpPr>
+        <p:spPr>
+          <a:xfrm>
+            <a:off x="548640" y="5257800"/>
+            <a:ext cx="17190720" cy="420624"/>
+          </a:xfrm>
+          <a:prstGeom prst="roundRect">
+            <a:avLst>
+              <a:gd name="adj" fmla="val 10870"/>
+            </a:avLst>
+          </a:prstGeom>
+          <a:solidFill>
+            <a:srgbClr val="317A80"/>
+          </a:solidFill>
+          <a:ln w="12700">
+            <a:solidFill>
+              <a:srgbClr val="317A80"/>
+            </a:solidFill>
+            <a:prstDash val="solid"/>
+          </a:ln>
+        </p:spPr>
+      </p:sp>
+      <p:sp>
+        <p:nvSpPr>
+          <p:cNvPr id="30" name="Shape 28"/>
+          <p:cNvSpPr/>
+          <p:nvPr/>
+        </p:nvSpPr>
+        <p:spPr>
+          <a:xfrm>
+            <a:off x="548640" y="5513832"/>
+            <a:ext cx="17190720" cy="164592"/>
+          </a:xfrm>
+          <a:prstGeom prst="rect">
+            <a:avLst/>
+          </a:prstGeom>
+          <a:solidFill>
+            <a:srgbClr val="317A80"/>
+          </a:solidFill>
+          <a:ln w="12700">
+            <a:solidFill>
+              <a:srgbClr val="317A80"/>
+            </a:solidFill>
+            <a:prstDash val="solid"/>
+          </a:ln>
+        </p:spPr>
+      </p:sp>
+      <p:sp>
+        <p:nvSpPr>
+          <p:cNvPr id="31" name="Text 29"/>
+          <p:cNvSpPr txBox="1"/>
+          <p:nvPr/>
+        </p:nvSpPr>
+        <p:spPr>
+          <a:xfrm>
+            <a:off x="731520" y="5257800"/>
+            <a:ext cx="16824960" cy="420624"/>
+          </a:xfrm>
+          <a:prstGeom prst="rect">
+            <a:avLst/>
+          </a:prstGeom>
+          <a:noFill/>
+          <a:ln/>
+        </p:spPr>
+        <p:txBody>
+          <a:bodyPr wrap="square" lIns="0" tIns="0" rIns="0" bIns="0" rtlCol="0" anchor="ctr"/>
+          <a:lstStyle/>
+          <a:p>
+            <a:pPr indent="0" marL="0">
+              <a:buNone/>
+            </a:pPr>
+            <a:r>
+              <a:rPr lang="en-US" sz="1400" b="1" spc="60" kern="0" dirty="0">
+                <a:solidFill>
+                  <a:srgbClr val="FFFFFF"/>
+                </a:solidFill>
+                <a:latin typeface="Arial" pitchFamily="34" charset="0"/>
+                <a:ea typeface="Arial" pitchFamily="34" charset="-122"/>
+                <a:cs typeface="Arial" pitchFamily="34" charset="-120"/>
+              </a:rPr>
+              <a:t>WHAT THIS MEANS FOR ASP2616</a:t>
+            </a:r>
+            <a:endParaRPr lang="en-US" sz="1400" dirty="0"/>
+          </a:p>
+        </p:txBody>
+      </p:sp>
+      <p:sp>
+        <p:nvSpPr>
+          <p:cNvPr id="32" name="Text 30"/>
+          <p:cNvSpPr txBox="1"/>
+          <p:nvPr/>
+        </p:nvSpPr>
+        <p:spPr>
+          <a:xfrm>
+            <a:off x="804672" y="5824728"/>
+            <a:ext cx="16678656" cy="2834640"/>
+          </a:xfrm>
+          <a:prstGeom prst="rect">
+            <a:avLst/>
+          </a:prstGeom>
+          <a:noFill/>
+          <a:ln/>
+        </p:spPr>
+        <p:txBody>
+          <a:bodyPr wrap="square" lIns="0" tIns="0" rIns="0" bIns="0" rtlCol="0" anchor="t"/>
+          <a:lstStyle/>
+          <a:p>
+            <a:pPr indent="0" marL="0">
+              <a:lnSpc>
+                <a:spcPct val="106000"/>
+              </a:lnSpc>
+              <a:buNone/>
+            </a:pPr>
+            <a:r>
+              <a:rPr lang="en-US" sz="1350" b="1" dirty="0">
+                <a:solidFill>
+                  <a:srgbClr val="22585C"/>
+                </a:solidFill>
+                <a:latin typeface="Arial" pitchFamily="34" charset="0"/>
+                <a:ea typeface="Arial" pitchFamily="34" charset="-122"/>
+                <a:cs typeface="Arial" pitchFamily="34" charset="-120"/>
+              </a:rPr>
+              <a:t>The differentiator in the original thesis may be the liability.  </a:t>
+            </a:r>
+            <a:pPr indent="0" marL="0">
+              <a:lnSpc>
+                <a:spcPct val="106000"/>
+              </a:lnSpc>
+              <a:buNone/>
+            </a:pPr>
+            <a:r>
+              <a:rPr lang="en-US" sz="1350" dirty="0">
+                <a:solidFill>
+                  <a:srgbClr val="1F2A2B"/>
+                </a:solidFill>
+                <a:latin typeface="Arial" pitchFamily="34" charset="0"/>
+                <a:ea typeface="Arial" pitchFamily="34" charset="-122"/>
+                <a:cs typeface="Arial" pitchFamily="34" charset="-120"/>
+              </a:rPr>
+              <a:t>Selective DGKζ inhibition was framed as a strength. The published pharmacology now points the other way: a 2026 J Pharmacol Exp Ther study reports that selective DGKζ inhibition produced only </a:t>
+            </a:r>
+            <a:pPr indent="0" marL="0">
+              <a:lnSpc>
+                <a:spcPct val="106000"/>
+              </a:lnSpc>
+              <a:buNone/>
+            </a:pPr>
+            <a:r>
+              <a:rPr lang="en-US" sz="1350" b="1" dirty="0">
+                <a:solidFill>
+                  <a:srgbClr val="1F2A2B"/>
+                </a:solidFill>
+                <a:latin typeface="Arial" pitchFamily="34" charset="0"/>
+                <a:ea typeface="Arial" pitchFamily="34" charset="-122"/>
+                <a:cs typeface="Arial" pitchFamily="34" charset="-120"/>
+              </a:rPr>
+              <a:t>modest</a:t>
+            </a:r>
+            <a:pPr indent="0" marL="0">
+              <a:lnSpc>
+                <a:spcPct val="106000"/>
+              </a:lnSpc>
+              <a:spcAft>
+                <a:spcPts val="1100"/>
+              </a:spcAft>
+              <a:buNone/>
+            </a:pPr>
+            <a:r>
+              <a:rPr lang="en-US" sz="1350" dirty="0">
+                <a:solidFill>
+                  <a:srgbClr val="1F2A2B"/>
+                </a:solidFill>
+                <a:latin typeface="Arial" pitchFamily="34" charset="0"/>
+                <a:ea typeface="Arial" pitchFamily="34" charset="-122"/>
+                <a:cs typeface="Arial" pitchFamily="34" charset="-120"/>
+              </a:rPr>
+              <a:t> effects on TCR-mediated activity and DGKα inhibition alone had minimal effect, while dual α/ζ inhibition drove the largest gains in cytokine production and tumor-cell killing — including in TILs from NSCLC biopsies.</a:t>
+            </a:r>
+            <a:endParaRPr lang="en-US" sz="1350" dirty="0"/>
+          </a:p>
+          <a:p>
+            <a:pPr indent="0" marL="0">
+              <a:lnSpc>
+                <a:spcPct val="106000"/>
+              </a:lnSpc>
+              <a:buNone/>
+            </a:pPr>
+            <a:r>
+              <a:rPr lang="en-US" sz="1350" b="1" dirty="0">
+                <a:solidFill>
+                  <a:srgbClr val="22585C"/>
+                </a:solidFill>
+                <a:latin typeface="Arial" pitchFamily="34" charset="0"/>
+                <a:ea typeface="Arial" pitchFamily="34" charset="-122"/>
+                <a:cs typeface="Arial" pitchFamily="34" charset="-120"/>
+              </a:rPr>
+              <a:t>Two of three sponsors have exited selective ζ within twelve months.  </a:t>
+            </a:r>
+            <a:pPr indent="0" marL="0">
+              <a:lnSpc>
+                <a:spcPct val="106000"/>
+              </a:lnSpc>
+              <a:spcAft>
+                <a:spcPts val="1100"/>
+              </a:spcAft>
+              <a:buNone/>
+            </a:pPr>
+            <a:r>
+              <a:rPr lang="en-US" sz="1350" dirty="0">
+                <a:solidFill>
+                  <a:srgbClr val="1F2A2B"/>
+                </a:solidFill>
+                <a:latin typeface="Arial" pitchFamily="34" charset="0"/>
+                <a:ea typeface="Arial" pitchFamily="34" charset="-122"/>
+                <a:cs typeface="Arial" pitchFamily="34" charset="-120"/>
+              </a:rPr>
+              <a:t>Bayer discontinued veludacigib in Nov-2025; Astellas let this IND lapse in May-2026. Everything still advancing — BMS, Incyte — is dual α/ζ. Neither exit was attributed to a disclosed safety or efficacy failure, so this is a pattern to explain, not yet a verdict.</a:t>
+            </a:r>
+            <a:endParaRPr lang="en-US" sz="1350" dirty="0"/>
+          </a:p>
+          <a:p>
+            <a:pPr indent="0" marL="0">
+              <a:lnSpc>
+                <a:spcPct val="106000"/>
+              </a:lnSpc>
+              <a:buNone/>
+            </a:pPr>
+            <a:r>
+              <a:rPr lang="en-US" sz="1350" b="1" dirty="0">
+                <a:solidFill>
+                  <a:srgbClr val="22585C"/>
+                </a:solidFill>
+                <a:latin typeface="Arial" pitchFamily="34" charset="0"/>
+                <a:ea typeface="Arial" pitchFamily="34" charset="-122"/>
+                <a:cs typeface="Arial" pitchFamily="34" charset="-120"/>
+              </a:rPr>
+              <a:t>The neurotoxicity premise is unverified.  </a:t>
+            </a:r>
+            <a:pPr indent="0" marL="0">
+              <a:lnSpc>
+                <a:spcPct val="106000"/>
+              </a:lnSpc>
+              <a:spcAft>
+                <a:spcPts val="1100"/>
+              </a:spcAft>
+              <a:buNone/>
+            </a:pPr>
+            <a:r>
+              <a:rPr lang="en-US" sz="1350" dirty="0">
+                <a:solidFill>
+                  <a:srgbClr val="1F2A2B"/>
+                </a:solidFill>
+                <a:latin typeface="Arial" pitchFamily="34" charset="0"/>
+                <a:ea typeface="Arial" pitchFamily="34" charset="-122"/>
+                <a:cs typeface="Arial" pitchFamily="34" charset="-120"/>
+              </a:rPr>
+              <a:t>No public source was found for a class neurotoxicity signal or for moderate clinical efficacy; no Phase 1 data have been reported for either program. Bayer's disclosed preclinical toxicology was low-grade gastrointestinal. If that read came from a non-public source it should be recorded as such — it is currently carrying weight the public evidence does not support.</a:t>
+            </a:r>
+            <a:endParaRPr lang="en-US" sz="1350" dirty="0"/>
+          </a:p>
+          <a:p>
+            <a:pPr indent="0" marL="0">
+              <a:lnSpc>
+                <a:spcPct val="106000"/>
+              </a:lnSpc>
+              <a:buNone/>
+            </a:pPr>
+            <a:r>
+              <a:rPr lang="en-US" sz="1350" b="1" dirty="0">
+                <a:solidFill>
+                  <a:srgbClr val="22585C"/>
+                </a:solidFill>
+                <a:latin typeface="Arial" pitchFamily="34" charset="0"/>
+                <a:ea typeface="Arial" pitchFamily="34" charset="-122"/>
+                <a:cs typeface="Arial" pitchFamily="34" charset="-120"/>
+              </a:rPr>
+              <a:t>Net effect on the score:  </a:t>
+            </a:r>
+            <a:pPr indent="0" marL="0">
+              <a:lnSpc>
+                <a:spcPct val="106000"/>
+              </a:lnSpc>
+              <a:buNone/>
+            </a:pPr>
+            <a:r>
+              <a:rPr lang="en-US" sz="1350" dirty="0">
+                <a:solidFill>
+                  <a:srgbClr val="1F2A2B"/>
+                </a:solidFill>
+                <a:latin typeface="Arial" pitchFamily="34" charset="0"/>
+                <a:ea typeface="Arial" pitchFamily="34" charset="-122"/>
+                <a:cs typeface="Arial" pitchFamily="34" charset="-120"/>
+              </a:rPr>
+              <a:t>differentiation drops from 2 to 1 (LSB lane 1.85 → 1.65). Translational readiness is held at 2 — the DAG/TCR axis is validated biology and the open question is isoform coverage, not mechanism — so the same finding is not counted twice.</a:t>
+            </a:r>
+            <a:endParaRPr lang="en-US" sz="1350" dirty="0"/>
+          </a:p>
+        </p:txBody>
+      </p:sp>
+      <p:sp>
+        <p:nvSpPr>
+          <p:cNvPr id="33" name="Text 31"/>
+          <p:cNvSpPr txBox="1"/>
+          <p:nvPr/>
+        </p:nvSpPr>
+        <p:spPr>
+          <a:xfrm>
+            <a:off x="548640" y="8979408"/>
+            <a:ext cx="17190720" cy="457200"/>
+          </a:xfrm>
+          <a:prstGeom prst="rect">
+            <a:avLst/>
+          </a:prstGeom>
+          <a:noFill/>
+          <a:ln/>
+        </p:spPr>
+        <p:txBody>
+          <a:bodyPr wrap="square" lIns="0" tIns="0" rIns="0" bIns="0" rtlCol="0" anchor="t"/>
+          <a:lstStyle/>
+          <a:p>
+            <a:pPr indent="0" marL="0">
+              <a:lnSpc>
+                <a:spcPct val="105000"/>
+              </a:lnSpc>
+              <a:buNone/>
+            </a:pPr>
+            <a:r>
+              <a:rPr lang="en-US" sz="1050" dirty="0">
+                <a:solidFill>
+                  <a:srgbClr val="8A9A9A"/>
+                </a:solidFill>
+                <a:latin typeface="Arial" pitchFamily="34" charset="0"/>
+                <a:ea typeface="Arial" pitchFamily="34" charset="-122"/>
+                <a:cs typeface="Arial" pitchFamily="34" charset="-120"/>
+              </a:rPr>
+              <a:t>Sources: AACR Cancer Res ND04 (BAY 2965501); Cancer Immunol Res 2025;13(9):1342 and J Med Chem 2025;68(20):21840 (BMS-986408); AACR 2025 abstr. 3789 (INCB177054); J Pharmacol Exp Ther 2026, PMID 42068678; FierceBiotech 12-Nov-2025 (Bayer discontinuation). Trial registry records were not directly reachable from this session.</a:t>
+            </a:r>
+            <a:endParaRPr lang="en-US" sz="1050" dirty="0"/>
+          </a:p>
+        </p:txBody>
+      </p:sp>
+      <p:sp>
+        <p:nvSpPr>
+          <p:cNvPr id="34" name="Text 32"/>
+          <p:cNvSpPr txBox="1"/>
+          <p:nvPr/>
+        </p:nvSpPr>
+        <p:spPr>
+          <a:xfrm>
+            <a:off x="548640" y="9893808"/>
+            <a:ext cx="13716000" cy="274320"/>
+          </a:xfrm>
+          <a:prstGeom prst="rect">
+            <a:avLst/>
+          </a:prstGeom>
+          <a:noFill/>
+          <a:ln/>
+        </p:spPr>
+        <p:txBody>
+          <a:bodyPr wrap="square" lIns="0" tIns="0" rIns="0" bIns="0" rtlCol="0" anchor="ctr"/>
+          <a:lstStyle/>
+          <a:p>
+            <a:pPr indent="0" marL="0">
+              <a:buNone/>
+            </a:pPr>
+            <a:r>
+              <a:rPr lang="en-US" sz="1100" dirty="0">
+                <a:solidFill>
+                  <a:srgbClr val="8A9A9A"/>
+                </a:solidFill>
+                <a:latin typeface="Arial" pitchFamily="34" charset="0"/>
+                <a:ea typeface="Arial" pitchFamily="34" charset="-122"/>
+                <a:cs typeface="Arial" pitchFamily="34" charset="-120"/>
+              </a:rPr>
+              <a:t>LevelSet Bio — Asset Triage Scorecard   |   Scoring rubric per LSB Disease Priorities for Acquisition (7.17.26)</a:t>
+            </a:r>
+            <a:endParaRPr lang="en-US" sz="1100" dirty="0"/>
+          </a:p>
+        </p:txBody>
+      </p:sp>
+      <p:sp>
+        <p:nvSpPr>
+          <p:cNvPr id="35" name="Text 33"/>
+          <p:cNvSpPr txBox="1"/>
+          <p:nvPr/>
+        </p:nvSpPr>
+        <p:spPr>
+          <a:xfrm>
+            <a:off x="17373600" y="9893808"/>
+            <a:ext cx="365760" cy="274320"/>
+          </a:xfrm>
+          <a:prstGeom prst="rect">
+            <a:avLst/>
+          </a:prstGeom>
+          <a:noFill/>
+          <a:ln/>
+        </p:spPr>
+        <p:txBody>
+          <a:bodyPr wrap="square" lIns="0" tIns="0" rIns="0" bIns="0" rtlCol="0" anchor="ctr"/>
+          <a:lstStyle/>
+          <a:p>
+            <a:pPr algn="r" indent="0" marL="0">
+              <a:buNone/>
+            </a:pPr>
+            <a:r>
+              <a:rPr lang="en-US" sz="1100" dirty="0">
+                <a:solidFill>
+                  <a:srgbClr val="8A9A9A"/>
+                </a:solidFill>
+                <a:latin typeface="Arial" pitchFamily="34" charset="0"/>
+                <a:ea typeface="Arial" pitchFamily="34" charset="-122"/>
+                <a:cs typeface="Arial" pitchFamily="34" charset="-120"/>
+              </a:rPr>
+              <a:t>2</a:t>
+            </a:r>
+            <a:endParaRPr lang="en-US" sz="1100" dirty="0"/>
+          </a:p>
+        </p:txBody>
+      </p:sp>
+    </p:spTree>
+  </p:cSld>
+  <p:clrMapOvr>
+    <a:masterClrMapping/>
+  </p:clrMapOvr>
+</p:sld>
+</file>
+
+<file path=ppt/slides/slide3.xml><?xml version="1.0" encoding="utf-8"?>
+<p:sld xmlns:a="http://schemas.openxmlformats.org/drawingml/2006/main" xmlns:r="http://schemas.openxmlformats.org/officeDocument/2006/relationships" xmlns:p="http://schemas.openxmlformats.org/presentationml/2006/main">
+  <p:cSld name="Slide 3">
+    <p:bg>
+      <p:bgPr>
+        <a:solidFill>
+          <a:srgbClr val="FFFFFF"/>
+        </a:solidFill>
+      </p:bgPr>
+    </p:bg>
+    <p:spTree>
+      <p:nvGrpSpPr>
+        <p:cNvPr id="1" name=""/>
+        <p:cNvGrpSpPr/>
+        <p:nvPr/>
+      </p:nvGrpSpPr>
+      <p:grpSpPr>
+        <a:xfrm>
+          <a:off x="0" y="0"/>
+          <a:ext cx="0" cy="0"/>
+          <a:chOff x="0" y="0"/>
+          <a:chExt cx="0" cy="0"/>
+        </a:xfrm>
+      </p:grpSpPr>
+      <p:sp>
+        <p:nvSpPr>
+          <p:cNvPr id="2" name="Text 0"/>
+          <p:cNvSpPr txBox="1"/>
+          <p:nvPr/>
+        </p:nvSpPr>
+        <p:spPr>
+          <a:xfrm>
+            <a:off x="548640" y="347472"/>
+            <a:ext cx="14173200" cy="640080"/>
+          </a:xfrm>
+          <a:prstGeom prst="rect">
+            <a:avLst/>
+          </a:prstGeom>
+          <a:noFill/>
+          <a:ln/>
+        </p:spPr>
+        <p:txBody>
+          <a:bodyPr wrap="square" lIns="0" tIns="0" rIns="0" bIns="0" rtlCol="0" anchor="ctr"/>
+          <a:lstStyle/>
+          <a:p>
+            <a:pPr indent="0" marL="0">
+              <a:buNone/>
+            </a:pPr>
+            <a:r>
+              <a:rPr lang="en-US" sz="4000" b="1" dirty="0">
+                <a:solidFill>
+                  <a:srgbClr val="22585C"/>
+                </a:solidFill>
+                <a:latin typeface="Arial" pitchFamily="34" charset="0"/>
+                <a:ea typeface="Arial" pitchFamily="34" charset="-122"/>
+                <a:cs typeface="Arial" pitchFamily="34" charset="-120"/>
+              </a:rPr>
+              <a:t>Scoring Key</a:t>
+            </a:r>
+            <a:endParaRPr lang="en-US" sz="4000" dirty="0"/>
+          </a:p>
+        </p:txBody>
+      </p:sp>
+      <p:sp>
+        <p:nvSpPr>
+          <p:cNvPr id="3" name="Text 1"/>
+          <p:cNvSpPr txBox="1"/>
+          <p:nvPr/>
+        </p:nvSpPr>
+        <p:spPr>
+          <a:xfrm>
+            <a:off x="548640" y="987552"/>
+            <a:ext cx="14173200" cy="329184"/>
+          </a:xfrm>
+          <a:prstGeom prst="rect">
+            <a:avLst/>
+          </a:prstGeom>
+          <a:noFill/>
+          <a:ln/>
+        </p:spPr>
+        <p:txBody>
+          <a:bodyPr wrap="square" lIns="0" tIns="0" rIns="0" bIns="0" rtlCol="0" anchor="ctr"/>
+          <a:lstStyle/>
+          <a:p>
+            <a:pPr indent="0" marL="0">
+              <a:buNone/>
+            </a:pPr>
+            <a:r>
+              <a:rPr lang="en-US" sz="1500" dirty="0">
+                <a:solidFill>
+                  <a:srgbClr val="595959"/>
+                </a:solidFill>
+                <a:latin typeface="Arial" pitchFamily="34" charset="0"/>
+                <a:ea typeface="Arial" pitchFamily="34" charset="-122"/>
+                <a:cs typeface="Arial" pitchFamily="34" charset="-120"/>
+              </a:rPr>
               <a:t>How every asset scorecard in this deck is rated — criteria and weights per LSB Disease Priorities for Acquisition (7.17.26), slide 4</a:t>
             </a:r>
             <a:endParaRPr lang="en-US" sz="1500" dirty="0"/>
@@ -5011,7 +6581,7 @@
       </p:sp>
       <p:graphicFrame>
         <p:nvGraphicFramePr>
-          <p:cNvPr id="3" name="Table 0"/>
+          <p:cNvPr id="4" name="Table 0"/>
           <p:cNvGraphicFramePr>
             <a:graphicFrameLocks noGrp="1"/>
           </p:cNvGraphicFramePr>
@@ -7907,7 +9477,7 @@
                 <a:ea typeface="Arial" pitchFamily="34" charset="-122"/>
                 <a:cs typeface="Arial" pitchFamily="34" charset="-120"/>
               </a:rPr>
-              <a:t>2</a:t>
+              <a:t>3</a:t>
             </a:r>
             <a:endParaRPr lang="en-US" sz="1100" dirty="0"/>
           </a:p>
@@ -7921,9 +9491,9 @@
 </p:sld>
 </file>
 
-<file path=ppt/slides/slide3.xml><?xml version="1.0" encoding="utf-8"?>
+<file path=ppt/slides/slide4.xml><?xml version="1.0" encoding="utf-8"?>
 <p:sld xmlns:a="http://schemas.openxmlformats.org/drawingml/2006/main" xmlns:r="http://schemas.openxmlformats.org/officeDocument/2006/relationships" xmlns:p="http://schemas.openxmlformats.org/presentationml/2006/main">
-  <p:cSld name="Slide 3">
+  <p:cSld name="Slide 4">
     <p:bg>
       <p:bgPr>
         <a:solidFill>
@@ -11260,7 +12830,7 @@
                 <a:ea typeface="Arial" pitchFamily="34" charset="-122"/>
                 <a:cs typeface="Arial" pitchFamily="34" charset="-120"/>
               </a:rPr>
-              <a:t>3</a:t>
+              <a:t>4</a:t>
             </a:r>
             <a:endParaRPr lang="en-US" sz="1100" dirty="0"/>
           </a:p>
